--- a/Science_Complete_Course_SagarSir/01_Physics_भौतिक_विज्ञान/Class_06_Pressure_Gravitation_NaturalPhenomena.pptx
+++ b/Science_Complete_Course_SagarSir/01_Physics_भौतिक_विज्ञान/Class_06_Pressure_Gravitation_NaturalPhenomena.pptx
@@ -3553,7 +3553,7 @@
               </a:defRPr>
             </a:pPr>
             <a:r>
-              <a:t>मार्गदर्शक: सागर सर (NMMS King)  |  Helpline / WhatsApp: +91 91101 13671  |  Website: sagarcoaching.tech</a:t>
+              <a:t>मार्गदर्शक: सागर सर (NMMS King)  |  Website: sagarcoaching.tech</a:t>
             </a:r>
           </a:p>
         </p:txBody>
@@ -3725,7 +3725,7 @@
               </a:defRPr>
             </a:pPr>
             <a:r>
-              <a:t>WhatsApp / Helpline: +91 91101 13671  |  वेबसाइट: sagarcoaching.tech  |  Slide 10 of 37</a:t>
+              <a:t>वेबसाइट: sagarcoaching.tech  |  Slide 10 of 37</a:t>
             </a:r>
           </a:p>
         </p:txBody>
@@ -4243,7 +4243,7 @@
               </a:defRPr>
             </a:pPr>
             <a:r>
-              <a:t>WhatsApp / Helpline: +91 91101 13671  |  वेबसाइट: sagarcoaching.tech  |  Slide 11 of 37</a:t>
+              <a:t>वेबसाइट: sagarcoaching.tech  |  Slide 11 of 37</a:t>
             </a:r>
           </a:p>
         </p:txBody>
@@ -4690,7 +4690,7 @@
               </a:defRPr>
             </a:pPr>
             <a:r>
-              <a:t>WhatsApp / Helpline: +91 91101 13671  |  वेबसाइट: sagarcoaching.tech  |  Slide 12 of 37</a:t>
+              <a:t>वेबसाइट: sagarcoaching.tech  |  Slide 12 of 37</a:t>
             </a:r>
           </a:p>
         </p:txBody>
@@ -5208,7 +5208,7 @@
               </a:defRPr>
             </a:pPr>
             <a:r>
-              <a:t>WhatsApp / Helpline: +91 91101 13671  |  वेबसाइट: sagarcoaching.tech  |  Slide 13 of 37</a:t>
+              <a:t>वेबसाइट: sagarcoaching.tech  |  Slide 13 of 37</a:t>
             </a:r>
           </a:p>
         </p:txBody>
@@ -5655,7 +5655,7 @@
               </a:defRPr>
             </a:pPr>
             <a:r>
-              <a:t>WhatsApp / Helpline: +91 91101 13671  |  वेबसाइट: sagarcoaching.tech  |  Slide 14 of 37</a:t>
+              <a:t>वेबसाइट: sagarcoaching.tech  |  Slide 14 of 37</a:t>
             </a:r>
           </a:p>
         </p:txBody>
@@ -6173,7 +6173,7 @@
               </a:defRPr>
             </a:pPr>
             <a:r>
-              <a:t>WhatsApp / Helpline: +91 91101 13671  |  वेबसाइट: sagarcoaching.tech  |  Slide 15 of 37</a:t>
+              <a:t>वेबसाइट: sagarcoaching.tech  |  Slide 15 of 37</a:t>
             </a:r>
           </a:p>
         </p:txBody>
@@ -6620,7 +6620,7 @@
               </a:defRPr>
             </a:pPr>
             <a:r>
-              <a:t>WhatsApp / Helpline: +91 91101 13671  |  वेबसाइट: sagarcoaching.tech  |  Slide 16 of 37</a:t>
+              <a:t>वेबसाइट: sagarcoaching.tech  |  Slide 16 of 37</a:t>
             </a:r>
           </a:p>
         </p:txBody>
@@ -7138,7 +7138,7 @@
               </a:defRPr>
             </a:pPr>
             <a:r>
-              <a:t>WhatsApp / Helpline: +91 91101 13671  |  वेबसाइट: sagarcoaching.tech  |  Slide 17 of 37</a:t>
+              <a:t>वेबसाइट: sagarcoaching.tech  |  Slide 17 of 37</a:t>
             </a:r>
           </a:p>
         </p:txBody>
@@ -7585,7 +7585,7 @@
               </a:defRPr>
             </a:pPr>
             <a:r>
-              <a:t>WhatsApp / Helpline: +91 91101 13671  |  वेबसाइट: sagarcoaching.tech  |  Slide 18 of 37</a:t>
+              <a:t>वेबसाइट: sagarcoaching.tech  |  Slide 18 of 37</a:t>
             </a:r>
           </a:p>
         </p:txBody>
@@ -8103,7 +8103,7 @@
               </a:defRPr>
             </a:pPr>
             <a:r>
-              <a:t>WhatsApp / Helpline: +91 91101 13671  |  वेबसाइट: sagarcoaching.tech  |  Slide 19 of 37</a:t>
+              <a:t>वेबसाइट: sagarcoaching.tech  |  Slide 19 of 37</a:t>
             </a:r>
           </a:p>
         </p:txBody>
@@ -8550,7 +8550,7 @@
               </a:defRPr>
             </a:pPr>
             <a:r>
-              <a:t>WhatsApp / Helpline: +91 91101 13671  |  वेबसाइट: sagarcoaching.tech  |  Slide 2 of 37</a:t>
+              <a:t>वेबसाइट: sagarcoaching.tech  |  Slide 2 of 37</a:t>
             </a:r>
           </a:p>
         </p:txBody>
@@ -8948,7 +8948,7 @@
               </a:defRPr>
             </a:pPr>
             <a:r>
-              <a:t>WhatsApp / Helpline: +91 91101 13671  |  वेबसाइट: sagarcoaching.tech  |  Slide 20 of 37</a:t>
+              <a:t>वेबसाइट: sagarcoaching.tech  |  Slide 20 of 37</a:t>
             </a:r>
           </a:p>
         </p:txBody>
@@ -9466,7 +9466,7 @@
               </a:defRPr>
             </a:pPr>
             <a:r>
-              <a:t>WhatsApp / Helpline: +91 91101 13671  |  वेबसाइट: sagarcoaching.tech  |  Slide 21 of 37</a:t>
+              <a:t>वेबसाइट: sagarcoaching.tech  |  Slide 21 of 37</a:t>
             </a:r>
           </a:p>
         </p:txBody>
@@ -9913,7 +9913,7 @@
               </a:defRPr>
             </a:pPr>
             <a:r>
-              <a:t>WhatsApp / Helpline: +91 91101 13671  |  वेबसाइट: sagarcoaching.tech  |  Slide 22 of 37</a:t>
+              <a:t>वेबसाइट: sagarcoaching.tech  |  Slide 22 of 37</a:t>
             </a:r>
           </a:p>
         </p:txBody>
@@ -10431,7 +10431,7 @@
               </a:defRPr>
             </a:pPr>
             <a:r>
-              <a:t>WhatsApp / Helpline: +91 91101 13671  |  वेबसाइट: sagarcoaching.tech  |  Slide 23 of 37</a:t>
+              <a:t>वेबसाइट: sagarcoaching.tech  |  Slide 23 of 37</a:t>
             </a:r>
           </a:p>
         </p:txBody>
@@ -10878,7 +10878,7 @@
               </a:defRPr>
             </a:pPr>
             <a:r>
-              <a:t>WhatsApp / Helpline: +91 91101 13671  |  वेबसाइट: sagarcoaching.tech  |  Slide 24 of 37</a:t>
+              <a:t>वेबसाइट: sagarcoaching.tech  |  Slide 24 of 37</a:t>
             </a:r>
           </a:p>
         </p:txBody>
@@ -11396,7 +11396,7 @@
               </a:defRPr>
             </a:pPr>
             <a:r>
-              <a:t>WhatsApp / Helpline: +91 91101 13671  |  वेबसाइट: sagarcoaching.tech  |  Slide 25 of 37</a:t>
+              <a:t>वेबसाइट: sagarcoaching.tech  |  Slide 25 of 37</a:t>
             </a:r>
           </a:p>
         </p:txBody>
@@ -11843,7 +11843,7 @@
               </a:defRPr>
             </a:pPr>
             <a:r>
-              <a:t>WhatsApp / Helpline: +91 91101 13671  |  वेबसाइट: sagarcoaching.tech  |  Slide 26 of 37</a:t>
+              <a:t>वेबसाइट: sagarcoaching.tech  |  Slide 26 of 37</a:t>
             </a:r>
           </a:p>
         </p:txBody>
@@ -12361,7 +12361,7 @@
               </a:defRPr>
             </a:pPr>
             <a:r>
-              <a:t>WhatsApp / Helpline: +91 91101 13671  |  वेबसाइट: sagarcoaching.tech  |  Slide 27 of 37</a:t>
+              <a:t>वेबसाइट: sagarcoaching.tech  |  Slide 27 of 37</a:t>
             </a:r>
           </a:p>
         </p:txBody>
@@ -12808,7 +12808,7 @@
               </a:defRPr>
             </a:pPr>
             <a:r>
-              <a:t>WhatsApp / Helpline: +91 91101 13671  |  वेबसाइट: sagarcoaching.tech  |  Slide 28 of 37</a:t>
+              <a:t>वेबसाइट: sagarcoaching.tech  |  Slide 28 of 37</a:t>
             </a:r>
           </a:p>
         </p:txBody>
@@ -13326,7 +13326,7 @@
               </a:defRPr>
             </a:pPr>
             <a:r>
-              <a:t>WhatsApp / Helpline: +91 91101 13671  |  वेबसाइट: sagarcoaching.tech  |  Slide 29 of 37</a:t>
+              <a:t>वेबसाइट: sagarcoaching.tech  |  Slide 29 of 37</a:t>
             </a:r>
           </a:p>
         </p:txBody>
@@ -13773,7 +13773,7 @@
               </a:defRPr>
             </a:pPr>
             <a:r>
-              <a:t>WhatsApp / Helpline: +91 91101 13671  |  वेबसाइट: sagarcoaching.tech  |  Slide 3 of 37</a:t>
+              <a:t>वेबसाइट: sagarcoaching.tech  |  Slide 3 of 37</a:t>
             </a:r>
           </a:p>
         </p:txBody>
@@ -14095,7 +14095,7 @@
               </a:defRPr>
             </a:pPr>
             <a:r>
-              <a:t>WhatsApp / Helpline: +91 91101 13671  |  वेबसाइट: sagarcoaching.tech  |  Slide 30 of 37</a:t>
+              <a:t>वेबसाइट: sagarcoaching.tech  |  Slide 30 of 37</a:t>
             </a:r>
           </a:p>
         </p:txBody>
@@ -14613,7 +14613,7 @@
               </a:defRPr>
             </a:pPr>
             <a:r>
-              <a:t>WhatsApp / Helpline: +91 91101 13671  |  वेबसाइट: sagarcoaching.tech  |  Slide 31 of 37</a:t>
+              <a:t>वेबसाइट: sagarcoaching.tech  |  Slide 31 of 37</a:t>
             </a:r>
           </a:p>
         </p:txBody>
@@ -15060,7 +15060,7 @@
               </a:defRPr>
             </a:pPr>
             <a:r>
-              <a:t>WhatsApp / Helpline: +91 91101 13671  |  वेबसाइट: sagarcoaching.tech  |  Slide 32 of 37</a:t>
+              <a:t>वेबसाइट: sagarcoaching.tech  |  Slide 32 of 37</a:t>
             </a:r>
           </a:p>
         </p:txBody>
@@ -15578,7 +15578,7 @@
               </a:defRPr>
             </a:pPr>
             <a:r>
-              <a:t>WhatsApp / Helpline: +91 91101 13671  |  वेबसाइट: sagarcoaching.tech  |  Slide 33 of 37</a:t>
+              <a:t>वेबसाइट: sagarcoaching.tech  |  Slide 33 of 37</a:t>
             </a:r>
           </a:p>
         </p:txBody>
@@ -16025,7 +16025,7 @@
               </a:defRPr>
             </a:pPr>
             <a:r>
-              <a:t>WhatsApp / Helpline: +91 91101 13671  |  वेबसाइट: sagarcoaching.tech  |  Slide 34 of 37</a:t>
+              <a:t>वेबसाइट: sagarcoaching.tech  |  Slide 34 of 37</a:t>
             </a:r>
           </a:p>
         </p:txBody>
@@ -16543,7 +16543,7 @@
               </a:defRPr>
             </a:pPr>
             <a:r>
-              <a:t>WhatsApp / Helpline: +91 91101 13671  |  वेबसाइट: sagarcoaching.tech  |  Slide 35 of 37</a:t>
+              <a:t>वेबसाइट: sagarcoaching.tech  |  Slide 35 of 37</a:t>
             </a:r>
           </a:p>
         </p:txBody>
@@ -16884,7 +16884,7 @@
               </a:defRPr>
             </a:pPr>
             <a:r>
-              <a:t>WhatsApp / Helpline: +91 91101 13671  |  वेबसाइट: sagarcoaching.tech  |  Slide 36 of 37</a:t>
+              <a:t>वेबसाइट: sagarcoaching.tech  |  Slide 36 of 37</a:t>
             </a:r>
           </a:p>
         </p:txBody>
@@ -17448,7 +17448,7 @@
               </a:defRPr>
             </a:pPr>
             <a:r>
-              <a:t>मार्गदर्शक: सागर सर (NMMS King)  |  Helpline / WhatsApp: +91 91101 13671  |  Website: sagarcoaching.tech</a:t>
+              <a:t>मार्गदर्शक: सागर सर (NMMS King)  |  Website: sagarcoaching.tech</a:t>
             </a:r>
           </a:p>
         </p:txBody>
@@ -17620,7 +17620,7 @@
               </a:defRPr>
             </a:pPr>
             <a:r>
-              <a:t>WhatsApp / Helpline: +91 91101 13671  |  वेबसाइट: sagarcoaching.tech  |  Slide 4 of 37</a:t>
+              <a:t>वेबसाइट: sagarcoaching.tech  |  Slide 4 of 37</a:t>
             </a:r>
           </a:p>
         </p:txBody>
@@ -17942,7 +17942,7 @@
               </a:defRPr>
             </a:pPr>
             <a:r>
-              <a:t>WhatsApp / Helpline: +91 91101 13671  |  वेबसाइट: sagarcoaching.tech  |  Slide 5 of 37</a:t>
+              <a:t>वेबसाइट: sagarcoaching.tech  |  Slide 5 of 37</a:t>
             </a:r>
           </a:p>
         </p:txBody>
@@ -18389,7 +18389,7 @@
               </a:defRPr>
             </a:pPr>
             <a:r>
-              <a:t>WhatsApp / Helpline: +91 91101 13671  |  वेबसाइट: sagarcoaching.tech  |  Slide 6 of 37</a:t>
+              <a:t>वेबसाइट: sagarcoaching.tech  |  Slide 6 of 37</a:t>
             </a:r>
           </a:p>
         </p:txBody>
@@ -18907,7 +18907,7 @@
               </a:defRPr>
             </a:pPr>
             <a:r>
-              <a:t>WhatsApp / Helpline: +91 91101 13671  |  वेबसाइट: sagarcoaching.tech  |  Slide 7 of 37</a:t>
+              <a:t>वेबसाइट: sagarcoaching.tech  |  Slide 7 of 37</a:t>
             </a:r>
           </a:p>
         </p:txBody>
@@ -19354,7 +19354,7 @@
               </a:defRPr>
             </a:pPr>
             <a:r>
-              <a:t>WhatsApp / Helpline: +91 91101 13671  |  वेबसाइट: sagarcoaching.tech  |  Slide 8 of 37</a:t>
+              <a:t>वेबसाइट: sagarcoaching.tech  |  Slide 8 of 37</a:t>
             </a:r>
           </a:p>
         </p:txBody>
@@ -19872,7 +19872,7 @@
               </a:defRPr>
             </a:pPr>
             <a:r>
-              <a:t>WhatsApp / Helpline: +91 91101 13671  |  वेबसाइट: sagarcoaching.tech  |  Slide 9 of 37</a:t>
+              <a:t>वेबसाइट: sagarcoaching.tech  |  Slide 9 of 37</a:t>
             </a:r>
           </a:p>
         </p:txBody>
